--- a/deck/ai-minimum-five-minutes.pptx
+++ b/deck/ai-minimum-five-minutes.pptx
@@ -507,7 +507,6 @@
             <a:r>
               <a:rPr lang="en-US" dirty="0"/>
               <a:t>A small charity can find out in ten minutes whether it meets the basic standard for using AI safely, and walk away with the paperwork to fix what is missing.
-That is the whole thing. Eight questions about the organisation. Then a checklist of eight things any organisation should be able to show.
 The content is not mine. It is The AI Bare Minimum Pack, from Governance AI. It was a Word document. Now it is a website that adapts itself to whoever is filling it in.</a:t>
             </a:r>
             <a:endParaRPr lang="en-US" dirty="0"/>
@@ -597,8 +596,9 @@
             <a:r>
               <a:rPr lang="en-US" dirty="0"/>
               <a:t>A real result from testing the live site.
-Six points out of eight. Seventy-five per cent. The product says the minimum is not met.
-Two of those eight are not like the other six. One is whether you have written down what staff must never type into an AI tool. The other is whether a human checks AI work before it reaches a client. Fail either one and the total stops mattering.
+Six out of eight. Seventy-five per cent.
+The product says the minimum is not met.
+Two of those eight points are not like the other six. One is whether you have written down what staff must never type into an AI tool. The other is whether a human checks AI work before it reaches a client. Fail either one and the total stops mattering. You do not meet the minimum, and the page says so above the score.
 That is why this is a product and not a quiz. A quiz would have told that organisation it got seventy-five per cent and left it feeling fine.</a:t>
             </a:r>
             <a:endParaRPr lang="en-US" dirty="0"/>
@@ -688,8 +688,7 @@
             <a:r>
               <a:rPr lang="en-US" dirty="0"/>
               <a:t>Let me show you.
-Eight questions. The check. The pack. Verdict first, score second. Their sector and size change the wording, never the rules.
-The policy has blanks they fill in here and we save them, and it downloads as a Word file, because a locked PDF of a policy template is no use to anyone.</a:t>
+Eight questions. The check. The pack. Verdict first, score second. Their sector and size change the wording, never the rules. The policy has blanks they fill in here and we save them, and it downloads as a Word file, because a locked PDF of a policy template is no use to anyone.</a:t>
             </a:r>
             <a:endParaRPr lang="en-US" dirty="0"/>
           </a:p>
@@ -777,11 +776,12 @@
           <a:p>
             <a:r>
               <a:rPr lang="en-US" dirty="0"/>
-              <a:t>The hardest question was whether to let the AI write the policy. Three options.
+              <a:t>The hardest question was whether to let the AI write the policy.
+Three options.
 Let it write the whole pack. Fast, and unusable. It invents obligations. It will tell a housing association it has thirty days to file a report that does not exist.
 Let it write nothing. Safe, and every organisation gets an identical document, which they can already get free.
 What I did instead is fix the Pack's words and let the AI write only in the margins. A paragraph describing their situation back to them. One realistic thing that could go wrong. One sentence for each point they failed.
-The part I would defend hardest: it cannot state a rule, because there is nowhere to put one. And everything it writes is checked before it reaches the page, against a list of things it must never mention. Laws. Regulators. Deadlines. Numbers. If a passage fails, the original text shows instead.</a:t>
+The part I would defend hardest is this. It cannot state a rule, because there is nowhere to put one. And everything it writes is checked before it reaches the page, against a list of things it must never mention. Laws. Regulators. Deadlines. Numbers. If a passage fails, the original text shows instead, and the reader never sees a gap.</a:t>
             </a:r>
             <a:endParaRPr lang="en-US" dirty="0"/>
           </a:p>

--- a/deck/ai-minimum-five-minutes.pptx
+++ b/deck/ai-minimum-five-minutes.pptx
@@ -506,8 +506,7 @@
           <a:p>
             <a:r>
               <a:rPr lang="en-US" dirty="0"/>
-              <a:t>A small charity can find out in ten minutes whether it meets the basic standard for using AI safely, and walk away with the paperwork to fix what is missing.
-The content is not mine. It is The AI Bare Minimum Pack, from Governance AI. It was a Word document. Now it is a website that adapts itself to whoever is filling it in.</a:t>
+              <a:t>What I have built is a website that lets a small charity work out in about ten minutes, without speaking to anybody, whether it meets the basic standard for using AI safely, and then hands it the paperwork to fix whatever is missing. The content is not mine — it is The AI Bare Minimum Pack from Governance AI, which until now has been a Word document that this adapts to whoever is filling it in.</a:t>
             </a:r>
             <a:endParaRPr lang="en-US" dirty="0"/>
           </a:p>
@@ -595,11 +594,7 @@
           <a:p>
             <a:r>
               <a:rPr lang="en-US" dirty="0"/>
-              <a:t>A real result from testing the live site.
-Six out of eight. Seventy-five per cent.
-The product says the minimum is not met.
-Two of those eight points are not like the other six. One is whether you have written down what staff must never type into an AI tool. The other is whether a human checks AI work before it reaches a client. Fail either one and the total stops mattering. You do not meet the minimum, and the page says so above the score.
-That is why this is a product and not a quiz. A quiz would have told that organisation it got seventy-five per cent and left it feeling fine.</a:t>
+              <a:t>This is a real result from testing the live site, and it explains better than anything why this had to be a product rather than a quiz. Six points out of eight, seventy-five per cent, and yet the product tells that organisation in the first line on the page, above the score, that it does not meet the minimum, because two of those eight points are not like the other six. One of them asks whether you have written down what your staff must never type into an AI tool, the other asks whether a human being checks AI work before it reaches a client, and failing either one means the total simply stops mattering.</a:t>
             </a:r>
             <a:endParaRPr lang="en-US" dirty="0"/>
           </a:p>
@@ -687,8 +682,7 @@
           <a:p>
             <a:r>
               <a:rPr lang="en-US" dirty="0"/>
-              <a:t>Let me show you.
-Eight questions. The check. The pack. Verdict first, score second. Their sector and size change the wording, never the rules. The policy has blanks they fill in here and we save them, and it downloads as a Word file, because a locked PDF of a policy template is no use to anyone.</a:t>
+              <a:t>Rather than describe it, let me show you what an organisation actually sees. So that is the eight questions, the check, and then the pack, with the verdict coming first and the score second, their sector and size changing the wording but never the rules, and a policy carrying blanks they fill in here and we save, which they can take away as a Word file.</a:t>
             </a:r>
             <a:endParaRPr lang="en-US" dirty="0"/>
           </a:p>
@@ -776,12 +770,7 @@
           <a:p>
             <a:r>
               <a:rPr lang="en-US" dirty="0"/>
-              <a:t>The hardest question was whether to let the AI write the policy.
-Three options.
-Let it write the whole pack. Fast, and unusable. It invents obligations. It will tell a housing association it has thirty days to file a report that does not exist.
-Let it write nothing. Safe, and every organisation gets an identical document, which they can already get free.
-What I did instead is fix the Pack's words and let the AI write only in the margins. A paragraph describing their situation back to them. One realistic thing that could go wrong. One sentence for each point they failed.
-The part I would defend hardest is this. It cannot state a rule, because there is nowhere to put one. And everything it writes is checked before it reaches the page, against a list of things it must never mention. Laws. Regulators. Deadlines. Numbers. If a passage fails, the original text shows instead, and the reader never sees a gap.</a:t>
+              <a:t>The hardest decision was whether the AI should be allowed to write the policy at all, and there were only three answers available. Letting it write the whole pack is fast and completely unusable, because it invents obligations nobody wrote, and will happily tell a housing association it has thirty days to file a report that does not exist. Letting it write nothing is perfectly safe, but then every organisation gets an identical document they could already have downloaded for free. So what I did was fix the Pack's own words in place and let the AI write only in the three short passages that sit beside them, and the part I would defend hardest is that it cannot state a rule even if it tried, because there is nowhere for it to put one.</a:t>
             </a:r>
             <a:endParaRPr lang="en-US" dirty="0"/>
           </a:p>
@@ -869,9 +858,7 @@
           <a:p>
             <a:r>
               <a:rPr lang="en-US" dirty="0"/>
-              <a:t>What works. The whole loop is live, and I have watched every step run on the deployed site, not just on my laptop.
-What does not. Nobody has confirmed that my transcription of it is faithful. I typed that document into code carefully, and carefully is not signed off. Until someone does that, this is a working prototype.
-What next. Let an organisation take the check again in six months. That is how a board watches four out of eight become seven, and it is the only real reason anyone comes back.</a:t>
+              <a:t>As for where it stands, the whole loop is live and I have watched every step of it run on the deployed site rather than on my laptop, but nobody has yet confirmed that my transcription of the Pack is faithful, and typing a document into code carefully is not the same thing as having it signed off. So until somebody does that, this is a working prototype rather than something you would put in front of the public. What I would do next is let an organisation take the check again in six months, so that a board can watch four out of eight become seven.</a:t>
             </a:r>
             <a:endParaRPr lang="en-US" dirty="0"/>
           </a:p>
@@ -1872,7 +1859,7 @@
                 <a:ea typeface="Consolas" pitchFamily="34" charset="-122"/>
                 <a:cs typeface="Consolas" pitchFamily="34" charset="-120"/>
               </a:rPr>
-              <a:t>NINETY SECONDS</a:t>
+              <a:t>ABOUT A MINUTE</a:t>
             </a:r>
             <a:endParaRPr lang="en-US" sz="1000" dirty="0"/>
           </a:p>
